--- a/versions/V7-report.pptx
+++ b/versions/V7-report.pptx
@@ -6754,7 +6754,7 @@
                 </a:solidFill>
                 <a:latin typeface="맑은 고딕"/>
               </a:rPr>
-              <a:t>· 공정기술 73개 전량 = 열위 17 · 동등 15 · 우위 20 · 확인 필요 16 · 근거 부족 5</a:t>
+              <a:t>· 공정기술 73개 전량 = 열위 4 · 동등 31 · 우위 33 · 확인 필요 0 · 근거 부족 5</a:t>
             </a:r>
           </a:p>
         </p:txBody>
@@ -7073,7 +7073,7 @@
                 </a:solidFill>
                 <a:latin typeface="맑은 고딕"/>
               </a:rPr>
-              <a:t>· '확인 필요' 16건은 자사 현황 미확인분 · '근거 부족' 5건은 경쟁사 근거 미확보분 — 미확보 대상이 상호 반대임</a:t>
+              <a:t>· '확인 필요' 0건은 자사 현황 미확인분 · '근거 부족' 5건은 경쟁사 근거 미확보분 — 미확보 대상이 상호 반대임</a:t>
             </a:r>
           </a:p>
         </p:txBody>
@@ -7813,7 +7813,7 @@
                 </a:solidFill>
                 <a:latin typeface="맑은 고딕"/>
               </a:rPr>
-              <a:t>재검증 17건 · 신규 편입 16건.
+              <a:t>재검증 17건 · 신규 편입 0건.
 생산기술혁신센터 확인 필요함.</a:t>
             </a:r>
           </a:p>
